--- a/documents/SoundHole.pptx
+++ b/documents/SoundHole.pptx
@@ -207,7 +207,7 @@
           <a:p>
             <a:fld id="{54F9177C-8DFD-45F8-8F1F-048885791E1A}" type="datetimeFigureOut">
               <a:rPr lang="ru-RU" smtClean="0"/>
-              <a:t>13.05.2026</a:t>
+              <a:t>14.05.2026</a:t>
             </a:fld>
             <a:endParaRPr lang="ru-RU"/>
           </a:p>
@@ -705,7 +705,7 @@
           <a:p>
             <a:fld id="{BF65B724-B0D4-46BE-B8A1-EA716E2F76E8}" type="datetimeFigureOut">
               <a:rPr lang="ru-RU" smtClean="0"/>
-              <a:t>13.05.2026</a:t>
+              <a:t>14.05.2026</a:t>
             </a:fld>
             <a:endParaRPr lang="ru-RU"/>
           </a:p>
@@ -903,7 +903,7 @@
           <a:p>
             <a:fld id="{BF65B724-B0D4-46BE-B8A1-EA716E2F76E8}" type="datetimeFigureOut">
               <a:rPr lang="ru-RU" smtClean="0"/>
-              <a:t>13.05.2026</a:t>
+              <a:t>14.05.2026</a:t>
             </a:fld>
             <a:endParaRPr lang="ru-RU"/>
           </a:p>
@@ -1111,7 +1111,7 @@
           <a:p>
             <a:fld id="{BF65B724-B0D4-46BE-B8A1-EA716E2F76E8}" type="datetimeFigureOut">
               <a:rPr lang="ru-RU" smtClean="0"/>
-              <a:t>13.05.2026</a:t>
+              <a:t>14.05.2026</a:t>
             </a:fld>
             <a:endParaRPr lang="ru-RU"/>
           </a:p>
@@ -1309,7 +1309,7 @@
           <a:p>
             <a:fld id="{BF65B724-B0D4-46BE-B8A1-EA716E2F76E8}" type="datetimeFigureOut">
               <a:rPr lang="ru-RU" smtClean="0"/>
-              <a:t>13.05.2026</a:t>
+              <a:t>14.05.2026</a:t>
             </a:fld>
             <a:endParaRPr lang="ru-RU"/>
           </a:p>
@@ -1584,7 +1584,7 @@
           <a:p>
             <a:fld id="{BF65B724-B0D4-46BE-B8A1-EA716E2F76E8}" type="datetimeFigureOut">
               <a:rPr lang="ru-RU" smtClean="0"/>
-              <a:t>13.05.2026</a:t>
+              <a:t>14.05.2026</a:t>
             </a:fld>
             <a:endParaRPr lang="ru-RU"/>
           </a:p>
@@ -1849,7 +1849,7 @@
           <a:p>
             <a:fld id="{BF65B724-B0D4-46BE-B8A1-EA716E2F76E8}" type="datetimeFigureOut">
               <a:rPr lang="ru-RU" smtClean="0"/>
-              <a:t>13.05.2026</a:t>
+              <a:t>14.05.2026</a:t>
             </a:fld>
             <a:endParaRPr lang="ru-RU"/>
           </a:p>
@@ -2261,7 +2261,7 @@
           <a:p>
             <a:fld id="{BF65B724-B0D4-46BE-B8A1-EA716E2F76E8}" type="datetimeFigureOut">
               <a:rPr lang="ru-RU" smtClean="0"/>
-              <a:t>13.05.2026</a:t>
+              <a:t>14.05.2026</a:t>
             </a:fld>
             <a:endParaRPr lang="ru-RU"/>
           </a:p>
@@ -2402,7 +2402,7 @@
           <a:p>
             <a:fld id="{BF65B724-B0D4-46BE-B8A1-EA716E2F76E8}" type="datetimeFigureOut">
               <a:rPr lang="ru-RU" smtClean="0"/>
-              <a:t>13.05.2026</a:t>
+              <a:t>14.05.2026</a:t>
             </a:fld>
             <a:endParaRPr lang="ru-RU"/>
           </a:p>
@@ -2515,7 +2515,7 @@
           <a:p>
             <a:fld id="{BF65B724-B0D4-46BE-B8A1-EA716E2F76E8}" type="datetimeFigureOut">
               <a:rPr lang="ru-RU" smtClean="0"/>
-              <a:t>13.05.2026</a:t>
+              <a:t>14.05.2026</a:t>
             </a:fld>
             <a:endParaRPr lang="ru-RU"/>
           </a:p>
@@ -2826,7 +2826,7 @@
           <a:p>
             <a:fld id="{BF65B724-B0D4-46BE-B8A1-EA716E2F76E8}" type="datetimeFigureOut">
               <a:rPr lang="ru-RU" smtClean="0"/>
-              <a:t>13.05.2026</a:t>
+              <a:t>14.05.2026</a:t>
             </a:fld>
             <a:endParaRPr lang="ru-RU"/>
           </a:p>
@@ -3114,7 +3114,7 @@
           <a:p>
             <a:fld id="{BF65B724-B0D4-46BE-B8A1-EA716E2F76E8}" type="datetimeFigureOut">
               <a:rPr lang="ru-RU" smtClean="0"/>
-              <a:t>13.05.2026</a:t>
+              <a:t>14.05.2026</a:t>
             </a:fld>
             <a:endParaRPr lang="ru-RU"/>
           </a:p>
@@ -3355,7 +3355,7 @@
           <a:p>
             <a:fld id="{BF65B724-B0D4-46BE-B8A1-EA716E2F76E8}" type="datetimeFigureOut">
               <a:rPr lang="ru-RU" smtClean="0"/>
-              <a:t>13.05.2026</a:t>
+              <a:t>14.05.2026</a:t>
             </a:fld>
             <a:endParaRPr lang="ru-RU"/>
           </a:p>
@@ -4106,7 +4106,7 @@
             </a:pathLst>
           </a:custGeom>
           <a:solidFill>
-            <a:srgbClr val="ECE3D4"/>
+            <a:srgbClr val="272B1B"/>
           </a:solidFill>
           <a:ln>
             <a:noFill/>
@@ -4219,17 +4219,26 @@
             <a:pPr algn="l"/>
             <a:r>
               <a:rPr lang="ru-RU" sz="1800" dirty="0">
+                <a:solidFill>
+                  <a:srgbClr val="FFF0E1"/>
+                </a:solidFill>
                 <a:latin typeface="Bahnschrift" panose="020B0502040204020203" pitchFamily="34" charset="0"/>
               </a:rPr>
               <a:t>Проект выполнили</a:t>
             </a:r>
             <a:r>
               <a:rPr lang="en-US" sz="1800" dirty="0">
+                <a:solidFill>
+                  <a:srgbClr val="FFF0E1"/>
+                </a:solidFill>
                 <a:latin typeface="Bahnschrift" panose="020B0502040204020203" pitchFamily="34" charset="0"/>
               </a:rPr>
               <a:t>:</a:t>
             </a:r>
             <a:endParaRPr lang="ru-RU" sz="1800" dirty="0">
+              <a:solidFill>
+                <a:srgbClr val="FFF0E1"/>
+              </a:solidFill>
               <a:latin typeface="Bahnschrift" panose="020B0502040204020203" pitchFamily="34" charset="0"/>
             </a:endParaRPr>
           </a:p>
@@ -4237,12 +4246,18 @@
             <a:pPr algn="l"/>
             <a:r>
               <a:rPr lang="ru-RU" sz="1800" b="1" dirty="0" err="1">
+                <a:solidFill>
+                  <a:srgbClr val="FFF0E1"/>
+                </a:solidFill>
                 <a:latin typeface="Bahnschrift" panose="020B0502040204020203" pitchFamily="34" charset="0"/>
               </a:rPr>
               <a:t>Крадинов</a:t>
             </a:r>
             <a:r>
               <a:rPr lang="ru-RU" sz="1800" b="1" dirty="0">
+                <a:solidFill>
+                  <a:srgbClr val="FFF0E1"/>
+                </a:solidFill>
                 <a:latin typeface="Bahnschrift" panose="020B0502040204020203" pitchFamily="34" charset="0"/>
               </a:rPr>
               <a:t> Дмитрий Павлович</a:t>
@@ -4252,6 +4267,9 @@
             <a:pPr algn="l"/>
             <a:r>
               <a:rPr lang="ru-RU" sz="1800" b="1" dirty="0">
+                <a:solidFill>
+                  <a:srgbClr val="FFF0E1"/>
+                </a:solidFill>
                 <a:latin typeface="Bahnschrift" panose="020B0502040204020203" pitchFamily="34" charset="0"/>
               </a:rPr>
               <a:t>Долженков Михаил Алексеевич</a:t>
@@ -4261,6 +4279,9 @@
             <a:pPr algn="l"/>
             <a:r>
               <a:rPr lang="ru-RU" sz="1800" dirty="0">
+                <a:solidFill>
+                  <a:srgbClr val="FFF0E1"/>
+                </a:solidFill>
                 <a:latin typeface="Bahnschrift" panose="020B0502040204020203" pitchFamily="34" charset="0"/>
               </a:rPr>
               <a:t>Яндекс Лицей</a:t>
@@ -4270,6 +4291,9 @@
             <a:pPr algn="l"/>
             <a:r>
               <a:rPr lang="ru-RU" sz="1800" dirty="0">
+                <a:solidFill>
+                  <a:srgbClr val="FFF0E1"/>
+                </a:solidFill>
                 <a:latin typeface="Bahnschrift" panose="020B0502040204020203" pitchFamily="34" charset="0"/>
               </a:rPr>
               <a:t>Группа №2 Год 2</a:t>
@@ -4543,6 +4567,9 @@
           <a:p>
             <a:r>
               <a:rPr lang="ru-RU" sz="1600" dirty="0">
+                <a:solidFill>
+                  <a:srgbClr val="FFF0E1"/>
+                </a:solidFill>
                 <a:latin typeface="Bahnschrift" panose="020B0502040204020203" pitchFamily="34" charset="0"/>
               </a:rPr>
               <a:t>Федеральное государственное бюджетное образовательное учреждение</a:t>
@@ -4551,6 +4578,9 @@
           <a:p>
             <a:r>
               <a:rPr lang="ru-RU" sz="1600" dirty="0">
+                <a:solidFill>
+                  <a:srgbClr val="FFF0E1"/>
+                </a:solidFill>
                 <a:latin typeface="Bahnschrift" panose="020B0502040204020203" pitchFamily="34" charset="0"/>
               </a:rPr>
               <a:t>высшего образования «МИРЭА – Российский технологический университет»</a:t>
@@ -4559,6 +4589,9 @@
           <a:p>
             <a:r>
               <a:rPr lang="ru-RU" sz="1600" dirty="0">
+                <a:solidFill>
+                  <a:srgbClr val="FFF0E1"/>
+                </a:solidFill>
                 <a:latin typeface="Bahnschrift" panose="020B0502040204020203" pitchFamily="34" charset="0"/>
               </a:rPr>
               <a:t>Детский технопарк «Альтаир»</a:t>
@@ -4761,23 +4794,35 @@
             <a:pPr algn="r"/>
             <a:r>
               <a:rPr lang="ru-RU" sz="1800" dirty="0">
+                <a:solidFill>
+                  <a:srgbClr val="FFF0E1"/>
+                </a:solidFill>
                 <a:latin typeface="Bahnschrift" panose="020B0502040204020203" pitchFamily="34" charset="0"/>
               </a:rPr>
               <a:t>Руководитель </a:t>
             </a:r>
             <a:r>
               <a:rPr lang="ru-RU" sz="1800" dirty="0" err="1">
+                <a:solidFill>
+                  <a:srgbClr val="FFF0E1"/>
+                </a:solidFill>
                 <a:latin typeface="Bahnschrift" panose="020B0502040204020203" pitchFamily="34" charset="0"/>
               </a:rPr>
               <a:t>проета</a:t>
             </a:r>
             <a:r>
               <a:rPr lang="en-US" sz="1800" dirty="0">
+                <a:solidFill>
+                  <a:srgbClr val="FFF0E1"/>
+                </a:solidFill>
                 <a:latin typeface="Bahnschrift" panose="020B0502040204020203" pitchFamily="34" charset="0"/>
               </a:rPr>
               <a:t>:</a:t>
             </a:r>
             <a:endParaRPr lang="ru-RU" sz="1800" dirty="0">
+              <a:solidFill>
+                <a:srgbClr val="FFF0E1"/>
+              </a:solidFill>
               <a:latin typeface="Bahnschrift" panose="020B0502040204020203" pitchFamily="34" charset="0"/>
             </a:endParaRPr>
           </a:p>
@@ -4785,6 +4830,9 @@
             <a:pPr algn="r"/>
             <a:r>
               <a:rPr lang="ru-RU" sz="1800" dirty="0">
+                <a:solidFill>
+                  <a:srgbClr val="FFF0E1"/>
+                </a:solidFill>
                 <a:latin typeface="Bahnschrift" panose="020B0502040204020203" pitchFamily="34" charset="0"/>
               </a:rPr>
               <a:t>Преподаватель ДТ «Альтаир»</a:t>
@@ -4794,6 +4842,9 @@
             <a:pPr algn="r"/>
             <a:r>
               <a:rPr lang="ru-RU" sz="1800" b="1" dirty="0">
+                <a:solidFill>
+                  <a:srgbClr val="FFF0E1"/>
+                </a:solidFill>
                 <a:latin typeface="Bahnschrift" panose="020B0502040204020203" pitchFamily="34" charset="0"/>
               </a:rPr>
               <a:t>Борисов Артём Игоревич</a:t>
@@ -5140,13 +5191,13 @@
   <p:clrMapOvr>
     <a:masterClrMapping/>
   </p:clrMapOvr>
-  <mc:AlternateContent xmlns:mc="http://schemas.openxmlformats.org/markup-compatibility/2006">
-    <mc:Choice xmlns:p159="http://schemas.microsoft.com/office/powerpoint/2015/09/main" Requires="p159">
+  <mc:AlternateContent xmlns:mc="http://schemas.openxmlformats.org/markup-compatibility/2006" xmlns:p159="http://schemas.microsoft.com/office/powerpoint/2015/09/main">
+    <mc:Choice Requires="p159">
       <p:transition xmlns:p14="http://schemas.microsoft.com/office/powerpoint/2010/main" spd="slow" p14:dur="2000">
         <p159:morph option="byObject"/>
       </p:transition>
     </mc:Choice>
-    <mc:Fallback>
+    <mc:Fallback xmlns="">
       <p:transition spd="slow">
         <p:fade/>
       </p:transition>
@@ -8713,13 +8764,13 @@
   <p:clrMapOvr>
     <a:masterClrMapping/>
   </p:clrMapOvr>
-  <mc:AlternateContent xmlns:mc="http://schemas.openxmlformats.org/markup-compatibility/2006">
-    <mc:Choice xmlns:p159="http://schemas.microsoft.com/office/powerpoint/2015/09/main" Requires="p159">
+  <mc:AlternateContent xmlns:mc="http://schemas.openxmlformats.org/markup-compatibility/2006" xmlns:p159="http://schemas.microsoft.com/office/powerpoint/2015/09/main">
+    <mc:Choice Requires="p159">
       <p:transition xmlns:p14="http://schemas.microsoft.com/office/powerpoint/2010/main" spd="slow" p14:dur="2000">
         <p159:morph option="byObject"/>
       </p:transition>
     </mc:Choice>
-    <mc:Fallback>
+    <mc:Fallback xmlns="">
       <p:transition spd="slow">
         <p:fade/>
       </p:transition>
